--- a/ゲーム科2年/00_前期/ゲーム開発Ⅰ/ゲーム物理学/座学/09_導関数と瞬間速度.pptx
+++ b/ゲーム科2年/00_前期/ゲーム開発Ⅰ/ゲーム物理学/座学/09_導関数と瞬間速度.pptx
@@ -274,7 +274,7 @@
           <a:p>
             <a:fld id="{E9CC885B-4903-4D54-9A93-00025F12DED9}" type="datetimeFigureOut">
               <a:rPr kumimoji="1" lang="ja-JP" altLang="en-US" smtClean="0"/>
-              <a:t>2024/12/17</a:t>
+              <a:t>2025/4/9</a:t>
             </a:fld>
             <a:endParaRPr kumimoji="1" lang="ja-JP" altLang="en-US"/>
           </a:p>
@@ -504,7 +504,7 @@
           <a:p>
             <a:fld id="{E9CC885B-4903-4D54-9A93-00025F12DED9}" type="datetimeFigureOut">
               <a:rPr kumimoji="1" lang="ja-JP" altLang="en-US" smtClean="0"/>
-              <a:t>2024/12/17</a:t>
+              <a:t>2025/4/9</a:t>
             </a:fld>
             <a:endParaRPr kumimoji="1" lang="ja-JP" altLang="en-US"/>
           </a:p>
@@ -744,7 +744,7 @@
           <a:p>
             <a:fld id="{E9CC885B-4903-4D54-9A93-00025F12DED9}" type="datetimeFigureOut">
               <a:rPr kumimoji="1" lang="ja-JP" altLang="en-US" smtClean="0"/>
-              <a:t>2024/12/17</a:t>
+              <a:t>2025/4/9</a:t>
             </a:fld>
             <a:endParaRPr kumimoji="1" lang="ja-JP" altLang="en-US"/>
           </a:p>
@@ -974,7 +974,7 @@
           <a:p>
             <a:fld id="{E9CC885B-4903-4D54-9A93-00025F12DED9}" type="datetimeFigureOut">
               <a:rPr kumimoji="1" lang="ja-JP" altLang="en-US" smtClean="0"/>
-              <a:t>2024/12/17</a:t>
+              <a:t>2025/4/9</a:t>
             </a:fld>
             <a:endParaRPr kumimoji="1" lang="ja-JP" altLang="en-US"/>
           </a:p>
@@ -1249,7 +1249,7 @@
           <a:p>
             <a:fld id="{E9CC885B-4903-4D54-9A93-00025F12DED9}" type="datetimeFigureOut">
               <a:rPr kumimoji="1" lang="ja-JP" altLang="en-US" smtClean="0"/>
-              <a:t>2024/12/17</a:t>
+              <a:t>2025/4/9</a:t>
             </a:fld>
             <a:endParaRPr kumimoji="1" lang="ja-JP" altLang="en-US"/>
           </a:p>
@@ -1578,7 +1578,7 @@
           <a:p>
             <a:fld id="{E9CC885B-4903-4D54-9A93-00025F12DED9}" type="datetimeFigureOut">
               <a:rPr kumimoji="1" lang="ja-JP" altLang="en-US" smtClean="0"/>
-              <a:t>2024/12/17</a:t>
+              <a:t>2025/4/9</a:t>
             </a:fld>
             <a:endParaRPr kumimoji="1" lang="ja-JP" altLang="en-US"/>
           </a:p>
@@ -2054,7 +2054,7 @@
           <a:p>
             <a:fld id="{E9CC885B-4903-4D54-9A93-00025F12DED9}" type="datetimeFigureOut">
               <a:rPr kumimoji="1" lang="ja-JP" altLang="en-US" smtClean="0"/>
-              <a:t>2024/12/17</a:t>
+              <a:t>2025/4/9</a:t>
             </a:fld>
             <a:endParaRPr kumimoji="1" lang="ja-JP" altLang="en-US"/>
           </a:p>
@@ -2195,7 +2195,7 @@
           <a:p>
             <a:fld id="{E9CC885B-4903-4D54-9A93-00025F12DED9}" type="datetimeFigureOut">
               <a:rPr kumimoji="1" lang="ja-JP" altLang="en-US" smtClean="0"/>
-              <a:t>2024/12/17</a:t>
+              <a:t>2025/4/9</a:t>
             </a:fld>
             <a:endParaRPr kumimoji="1" lang="ja-JP" altLang="en-US"/>
           </a:p>
@@ -2308,7 +2308,7 @@
           <a:p>
             <a:fld id="{E9CC885B-4903-4D54-9A93-00025F12DED9}" type="datetimeFigureOut">
               <a:rPr kumimoji="1" lang="ja-JP" altLang="en-US" smtClean="0"/>
-              <a:t>2024/12/17</a:t>
+              <a:t>2025/4/9</a:t>
             </a:fld>
             <a:endParaRPr kumimoji="1" lang="ja-JP" altLang="en-US"/>
           </a:p>
@@ -2651,7 +2651,7 @@
           <a:p>
             <a:fld id="{E9CC885B-4903-4D54-9A93-00025F12DED9}" type="datetimeFigureOut">
               <a:rPr kumimoji="1" lang="ja-JP" altLang="en-US" smtClean="0"/>
-              <a:t>2024/12/17</a:t>
+              <a:t>2025/4/9</a:t>
             </a:fld>
             <a:endParaRPr kumimoji="1" lang="ja-JP" altLang="en-US"/>
           </a:p>
@@ -2939,7 +2939,7 @@
           <a:p>
             <a:fld id="{E9CC885B-4903-4D54-9A93-00025F12DED9}" type="datetimeFigureOut">
               <a:rPr kumimoji="1" lang="ja-JP" altLang="en-US" smtClean="0"/>
-              <a:t>2024/12/17</a:t>
+              <a:t>2025/4/9</a:t>
             </a:fld>
             <a:endParaRPr kumimoji="1" lang="ja-JP" altLang="en-US"/>
           </a:p>
@@ -3212,7 +3212,7 @@
           <a:p>
             <a:fld id="{E9CC885B-4903-4D54-9A93-00025F12DED9}" type="datetimeFigureOut">
               <a:rPr kumimoji="1" lang="ja-JP" altLang="en-US" smtClean="0"/>
-              <a:t>2024/12/17</a:t>
+              <a:t>2025/4/9</a:t>
             </a:fld>
             <a:endParaRPr kumimoji="1" lang="ja-JP" altLang="en-US"/>
           </a:p>
@@ -4145,8 +4145,8 @@
           </a:p>
         </p:txBody>
       </p:sp>
-      <mc:AlternateContent xmlns:mc="http://schemas.openxmlformats.org/markup-compatibility/2006">
-        <mc:Choice xmlns:a14="http://schemas.microsoft.com/office/drawing/2010/main" Requires="a14">
+      <mc:AlternateContent xmlns:mc="http://schemas.openxmlformats.org/markup-compatibility/2006" xmlns:a14="http://schemas.microsoft.com/office/drawing/2010/main">
+        <mc:Choice Requires="a14">
           <p:sp>
             <p:nvSpPr>
               <p:cNvPr id="20" name="テキスト ボックス 19">
@@ -5163,7 +5163,7 @@
             </p:txBody>
           </p:sp>
         </mc:Choice>
-        <mc:Fallback>
+        <mc:Fallback xmlns="">
           <p:sp>
             <p:nvSpPr>
               <p:cNvPr id="20" name="テキスト ボックス 19">
@@ -7031,8 +7031,8 @@
           </a:p>
         </p:txBody>
       </p:sp>
-      <mc:AlternateContent xmlns:mc="http://schemas.openxmlformats.org/markup-compatibility/2006" xmlns:a14="http://schemas.microsoft.com/office/drawing/2010/main">
-        <mc:Choice Requires="a14">
+      <mc:AlternateContent xmlns:mc="http://schemas.openxmlformats.org/markup-compatibility/2006">
+        <mc:Choice xmlns:a14="http://schemas.microsoft.com/office/drawing/2010/main" Requires="a14">
           <p:sp>
             <p:nvSpPr>
               <p:cNvPr id="20" name="テキスト ボックス 19">
@@ -7063,7 +7063,7 @@
               <a:p>
                 <a:r>
                   <a:rPr lang="ja-JP" altLang="en-US" sz="2400" dirty="0"/>
-                  <a:t>ボールを真上に投げた時の、ぼるの位置を表す関数が、</a:t>
+                  <a:t>ボールを真上に投げた時の、ボールの位置を表す関数が、</a:t>
                 </a:r>
                 <a:endParaRPr lang="en-US" altLang="ja-JP" sz="2400" dirty="0"/>
               </a:p>
@@ -7936,7 +7936,7 @@
             </p:txBody>
           </p:sp>
         </mc:Choice>
-        <mc:Fallback xmlns="">
+        <mc:Fallback>
           <p:sp>
             <p:nvSpPr>
               <p:cNvPr id="20" name="テキスト ボックス 19">
@@ -8047,8 +8047,8 @@
           </a:p>
         </p:txBody>
       </p:sp>
-      <mc:AlternateContent xmlns:mc="http://schemas.openxmlformats.org/markup-compatibility/2006" xmlns:a14="http://schemas.microsoft.com/office/drawing/2010/main">
-        <mc:Choice Requires="a14">
+      <mc:AlternateContent xmlns:mc="http://schemas.openxmlformats.org/markup-compatibility/2006">
+        <mc:Choice xmlns:a14="http://schemas.microsoft.com/office/drawing/2010/main" Requires="a14">
           <p:sp>
             <p:nvSpPr>
               <p:cNvPr id="20" name="テキスト ボックス 19">
@@ -8079,7 +8079,7 @@
               <a:p>
                 <a:r>
                   <a:rPr lang="ja-JP" altLang="en-US" sz="2400" dirty="0"/>
-                  <a:t>ボールを真上に投げた時の、ぼるの位置を表す関数が、</a:t>
+                  <a:t>ボールを真上に投げた時の、ボールの位置を表す関数が、</a:t>
                 </a:r>
                 <a:endParaRPr lang="en-US" altLang="ja-JP" sz="2400" dirty="0"/>
               </a:p>
@@ -8189,7 +8189,7 @@
             </p:txBody>
           </p:sp>
         </mc:Choice>
-        <mc:Fallback xmlns="">
+        <mc:Fallback>
           <p:sp>
             <p:nvSpPr>
               <p:cNvPr id="20" name="テキスト ボックス 19">
@@ -14742,8 +14742,8 @@
           </a:p>
         </p:txBody>
       </p:sp>
-      <mc:AlternateContent xmlns:mc="http://schemas.openxmlformats.org/markup-compatibility/2006">
-        <mc:Choice xmlns:a14="http://schemas.microsoft.com/office/drawing/2010/main" Requires="a14">
+      <mc:AlternateContent xmlns:mc="http://schemas.openxmlformats.org/markup-compatibility/2006" xmlns:a14="http://schemas.microsoft.com/office/drawing/2010/main">
+        <mc:Choice Requires="a14">
           <p:sp>
             <p:nvSpPr>
               <p:cNvPr id="20" name="テキスト ボックス 19">
@@ -15641,7 +15641,7 @@
             </p:txBody>
           </p:sp>
         </mc:Choice>
-        <mc:Fallback>
+        <mc:Fallback xmlns="">
           <p:sp>
             <p:nvSpPr>
               <p:cNvPr id="20" name="テキスト ボックス 19">

--- a/ゲーム科2年/00_前期/ゲーム開発Ⅰ/ゲーム物理学/座学/09_導関数と瞬間速度.pptx
+++ b/ゲーム科2年/00_前期/ゲーム開発Ⅰ/ゲーム物理学/座学/09_導関数と瞬間速度.pptx
@@ -274,7 +274,7 @@
           <a:p>
             <a:fld id="{E9CC885B-4903-4D54-9A93-00025F12DED9}" type="datetimeFigureOut">
               <a:rPr kumimoji="1" lang="ja-JP" altLang="en-US" smtClean="0"/>
-              <a:t>2025/4/9</a:t>
+              <a:t>2025/7/18</a:t>
             </a:fld>
             <a:endParaRPr kumimoji="1" lang="ja-JP" altLang="en-US"/>
           </a:p>
@@ -504,7 +504,7 @@
           <a:p>
             <a:fld id="{E9CC885B-4903-4D54-9A93-00025F12DED9}" type="datetimeFigureOut">
               <a:rPr kumimoji="1" lang="ja-JP" altLang="en-US" smtClean="0"/>
-              <a:t>2025/4/9</a:t>
+              <a:t>2025/7/18</a:t>
             </a:fld>
             <a:endParaRPr kumimoji="1" lang="ja-JP" altLang="en-US"/>
           </a:p>
@@ -744,7 +744,7 @@
           <a:p>
             <a:fld id="{E9CC885B-4903-4D54-9A93-00025F12DED9}" type="datetimeFigureOut">
               <a:rPr kumimoji="1" lang="ja-JP" altLang="en-US" smtClean="0"/>
-              <a:t>2025/4/9</a:t>
+              <a:t>2025/7/18</a:t>
             </a:fld>
             <a:endParaRPr kumimoji="1" lang="ja-JP" altLang="en-US"/>
           </a:p>
@@ -974,7 +974,7 @@
           <a:p>
             <a:fld id="{E9CC885B-4903-4D54-9A93-00025F12DED9}" type="datetimeFigureOut">
               <a:rPr kumimoji="1" lang="ja-JP" altLang="en-US" smtClean="0"/>
-              <a:t>2025/4/9</a:t>
+              <a:t>2025/7/18</a:t>
             </a:fld>
             <a:endParaRPr kumimoji="1" lang="ja-JP" altLang="en-US"/>
           </a:p>
@@ -1249,7 +1249,7 @@
           <a:p>
             <a:fld id="{E9CC885B-4903-4D54-9A93-00025F12DED9}" type="datetimeFigureOut">
               <a:rPr kumimoji="1" lang="ja-JP" altLang="en-US" smtClean="0"/>
-              <a:t>2025/4/9</a:t>
+              <a:t>2025/7/18</a:t>
             </a:fld>
             <a:endParaRPr kumimoji="1" lang="ja-JP" altLang="en-US"/>
           </a:p>
@@ -1578,7 +1578,7 @@
           <a:p>
             <a:fld id="{E9CC885B-4903-4D54-9A93-00025F12DED9}" type="datetimeFigureOut">
               <a:rPr kumimoji="1" lang="ja-JP" altLang="en-US" smtClean="0"/>
-              <a:t>2025/4/9</a:t>
+              <a:t>2025/7/18</a:t>
             </a:fld>
             <a:endParaRPr kumimoji="1" lang="ja-JP" altLang="en-US"/>
           </a:p>
@@ -2054,7 +2054,7 @@
           <a:p>
             <a:fld id="{E9CC885B-4903-4D54-9A93-00025F12DED9}" type="datetimeFigureOut">
               <a:rPr kumimoji="1" lang="ja-JP" altLang="en-US" smtClean="0"/>
-              <a:t>2025/4/9</a:t>
+              <a:t>2025/7/18</a:t>
             </a:fld>
             <a:endParaRPr kumimoji="1" lang="ja-JP" altLang="en-US"/>
           </a:p>
@@ -2195,7 +2195,7 @@
           <a:p>
             <a:fld id="{E9CC885B-4903-4D54-9A93-00025F12DED9}" type="datetimeFigureOut">
               <a:rPr kumimoji="1" lang="ja-JP" altLang="en-US" smtClean="0"/>
-              <a:t>2025/4/9</a:t>
+              <a:t>2025/7/18</a:t>
             </a:fld>
             <a:endParaRPr kumimoji="1" lang="ja-JP" altLang="en-US"/>
           </a:p>
@@ -2308,7 +2308,7 @@
           <a:p>
             <a:fld id="{E9CC885B-4903-4D54-9A93-00025F12DED9}" type="datetimeFigureOut">
               <a:rPr kumimoji="1" lang="ja-JP" altLang="en-US" smtClean="0"/>
-              <a:t>2025/4/9</a:t>
+              <a:t>2025/7/18</a:t>
             </a:fld>
             <a:endParaRPr kumimoji="1" lang="ja-JP" altLang="en-US"/>
           </a:p>
@@ -2651,7 +2651,7 @@
           <a:p>
             <a:fld id="{E9CC885B-4903-4D54-9A93-00025F12DED9}" type="datetimeFigureOut">
               <a:rPr kumimoji="1" lang="ja-JP" altLang="en-US" smtClean="0"/>
-              <a:t>2025/4/9</a:t>
+              <a:t>2025/7/18</a:t>
             </a:fld>
             <a:endParaRPr kumimoji="1" lang="ja-JP" altLang="en-US"/>
           </a:p>
@@ -2939,7 +2939,7 @@
           <a:p>
             <a:fld id="{E9CC885B-4903-4D54-9A93-00025F12DED9}" type="datetimeFigureOut">
               <a:rPr kumimoji="1" lang="ja-JP" altLang="en-US" smtClean="0"/>
-              <a:t>2025/4/9</a:t>
+              <a:t>2025/7/18</a:t>
             </a:fld>
             <a:endParaRPr kumimoji="1" lang="ja-JP" altLang="en-US"/>
           </a:p>
@@ -3212,7 +3212,7 @@
           <a:p>
             <a:fld id="{E9CC885B-4903-4D54-9A93-00025F12DED9}" type="datetimeFigureOut">
               <a:rPr kumimoji="1" lang="ja-JP" altLang="en-US" smtClean="0"/>
-              <a:t>2025/4/9</a:t>
+              <a:t>2025/7/18</a:t>
             </a:fld>
             <a:endParaRPr kumimoji="1" lang="ja-JP" altLang="en-US"/>
           </a:p>
@@ -5274,8 +5274,8 @@
           </a:p>
         </p:txBody>
       </p:sp>
-      <mc:AlternateContent xmlns:mc="http://schemas.openxmlformats.org/markup-compatibility/2006" xmlns:a14="http://schemas.microsoft.com/office/drawing/2010/main">
-        <mc:Choice Requires="a14">
+      <mc:AlternateContent xmlns:mc="http://schemas.openxmlformats.org/markup-compatibility/2006">
+        <mc:Choice xmlns:a14="http://schemas.microsoft.com/office/drawing/2010/main" Requires="a14">
           <p:sp>
             <p:nvSpPr>
               <p:cNvPr id="20" name="テキスト ボックス 19">
@@ -5306,7 +5306,7 @@
               <a:p>
                 <a:r>
                   <a:rPr lang="ja-JP" altLang="en-US" sz="2400" dirty="0"/>
-                  <a:t>ボールを真上に投げた時の、ぼるの位置を表す関数が、</a:t>
+                  <a:t>ボールを真上に投げた時の、ボールの位置を表す関数が、</a:t>
                 </a:r>
                 <a:endParaRPr lang="en-US" altLang="ja-JP" sz="2400" dirty="0"/>
               </a:p>
@@ -5623,7 +5623,7 @@
                       <a:srgbClr val="FF0000"/>
                     </a:solidFill>
                   </a:rPr>
-                  <a:t>位置を表す関数</a:t>
+                  <a:t>位置を時間で表す関数</a:t>
                 </a:r>
                 <a:r>
                   <a:rPr lang="ja-JP" altLang="en-US" sz="2400" dirty="0"/>
@@ -5653,7 +5653,7 @@
             </p:txBody>
           </p:sp>
         </mc:Choice>
-        <mc:Fallback xmlns="">
+        <mc:Fallback>
           <p:sp>
             <p:nvSpPr>
               <p:cNvPr id="20" name="テキスト ボックス 19">
@@ -7031,8 +7031,8 @@
           </a:p>
         </p:txBody>
       </p:sp>
-      <mc:AlternateContent xmlns:mc="http://schemas.openxmlformats.org/markup-compatibility/2006">
-        <mc:Choice xmlns:a14="http://schemas.microsoft.com/office/drawing/2010/main" Requires="a14">
+      <mc:AlternateContent xmlns:mc="http://schemas.openxmlformats.org/markup-compatibility/2006" xmlns:a14="http://schemas.microsoft.com/office/drawing/2010/main">
+        <mc:Choice Requires="a14">
           <p:sp>
             <p:nvSpPr>
               <p:cNvPr id="20" name="テキスト ボックス 19">
@@ -7936,7 +7936,7 @@
             </p:txBody>
           </p:sp>
         </mc:Choice>
-        <mc:Fallback>
+        <mc:Fallback xmlns="">
           <p:sp>
             <p:nvSpPr>
               <p:cNvPr id="20" name="テキスト ボックス 19">
@@ -8047,8 +8047,8 @@
           </a:p>
         </p:txBody>
       </p:sp>
-      <mc:AlternateContent xmlns:mc="http://schemas.openxmlformats.org/markup-compatibility/2006">
-        <mc:Choice xmlns:a14="http://schemas.microsoft.com/office/drawing/2010/main" Requires="a14">
+      <mc:AlternateContent xmlns:mc="http://schemas.openxmlformats.org/markup-compatibility/2006" xmlns:a14="http://schemas.microsoft.com/office/drawing/2010/main">
+        <mc:Choice Requires="a14">
           <p:sp>
             <p:nvSpPr>
               <p:cNvPr id="20" name="テキスト ボックス 19">
@@ -8189,7 +8189,7 @@
             </p:txBody>
           </p:sp>
         </mc:Choice>
-        <mc:Fallback>
+        <mc:Fallback xmlns="">
           <p:sp>
             <p:nvSpPr>
               <p:cNvPr id="20" name="テキスト ボックス 19">
